--- a/deck/latency_edge_placement.pptx
+++ b/deck/latency_edge_placement.pptx
@@ -6989,7 +6989,7 @@
                   <a:srgbClr val="FFFFFF"/>
                 </a:solidFill>
               </a:rPr>
-              <a:t>▸ live/: 2 s controller loop, browser dashboard, 27 unit tests</a:t>
+              <a:t>▸ live/: 2 s controller loop, browser dashboard, 29 unit tests</a:t>
             </a:r>
           </a:p>
           <a:p>
